--- a/pptx/midterm/REMUS_Future_Work_Slide_11.pptx
+++ b/pptx/midterm/REMUS_Future_Work_Slide_11.pptx
@@ -823,7 +823,7 @@
                 <a:latin typeface="Arial"/>
                 <a:ea typeface="Arial"/>
               </a:rPr>
-              <a:t>Future Work</a:t>
+              <a:t>11. Future Work</a:t>
             </a:r>
           </a:p>
         </p:txBody>

--- a/pptx/midterm/REMUS_Future_Work_Slide_11.pptx
+++ b/pptx/midterm/REMUS_Future_Work_Slide_11.pptx
@@ -5,10 +5,10 @@
     <p:sldMasterId xmlns:r="http://schemas.openxmlformats.org/officeDocument/2006/relationships" id="2147483648" r:id="rId1"/>
   </p:sldMasterIdLst>
   <p:notesMasterIdLst>
-    <p:notesMasterId r:id="R9b2af560fad542a0"/>
+    <p:notesMasterId r:id="R4661ba8767b84bb2"/>
   </p:notesMasterIdLst>
   <p:sldIdLst>
-    <p:sldId id="256" r:id="Rc8183487e87a4c36"/>
+    <p:sldId id="256" r:id="R104014dbd06f42e4"/>
   </p:sldIdLst>
   <p:sldSz cx="12192000" cy="6858000" type="screen16x9"/>
   <p:notesSz cx="6858000" cy="9144000"/>
@@ -471,7 +471,7 @@
           <a:p xmlns:a="http://schemas.openxmlformats.org/drawingml/2006/main">
             <a:r>
               <a:rPr lang="en-US"/>
-              <a:t>This page combines the remaining problems with the work that addresses them; it does not repeat a separate problem list. First complete Fabric board-level integration and validation, then assemble a four-FPGA emulation system. That platform will support analysis of execution and communication overheads. Use the measurements to guide runtime changes, including interrupt-driven control to reduce Fabric polling overhead. Optimize partitioning for multiple resource types and communication cost, then evaluate whether those changes improve actual emulation performance. Do not promise a performance gain before the experiments. These technical activities may iterate rather than forming a strict one-pass sequence. Finally consolidate experimental results and complete the thesis. Fabric board validation, four-FPGA deployment and interrupt-driven control are future work, not completed results. No defense date is implied. Sources: src/midterm/problems.tex and src/midterm/next_plan.tex; wording and ordering follow the user's approved four-item plan. Design reference: figure/presentation-reference/midterm-future-work-11-v1.png. The user requested smaller 1., 2., 3., 4. numbering at the heading font size, replacing the large 01–04 in that image. All visible objects are native editable PowerPoint shapes, not an embedded design screenshot.</a:t>
+              <a:t>The author's revised plan contains three items: Fabric board-level integration and validation followed by a four-FPGA system; execution and communication overhead analysis on that system; consolidation of results and thesis writing. These are future work. The separate partitioning-optimization item and interrupt-driven-control sentence were removed in the author's 2026-10-29 revision.</a:t>
             </a:r>
           </a:p>
         </p:txBody>
@@ -776,7 +776,7 @@
 
 <file path=ppt/slides/slide1.xml><?xml version="1.0" encoding="utf-8"?>
 <p:sld xmlns:a="http://schemas.openxmlformats.org/drawingml/2006/main" xmlns:p="http://schemas.openxmlformats.org/presentationml/2006/main">
-  <p:cSld>
+  <p:cSld xmlns:a="http://schemas.openxmlformats.org/drawingml/2006/main" xmlns:p="http://schemas.openxmlformats.org/presentationml/2006/main">
     <p:bg>
       <p:bgPr>
         <a:solidFill xmlns:a="http://schemas.openxmlformats.org/drawingml/2006/main">
@@ -815,6 +815,11 @@
           </a:bodyPr>
           <a:lstStyle xmlns:a="http://schemas.openxmlformats.org/drawingml/2006/main"/>
           <a:p xmlns:a="http://schemas.openxmlformats.org/drawingml/2006/main">
+            <a:pPr>
+              <a:lnSpc>
+                <a:spcPct val="90000"/>
+              </a:lnSpc>
+            </a:pPr>
             <a:r>
               <a:rPr lang="en-US" sz="3200" b="1">
                 <a:solidFill>
@@ -1159,7 +1164,7 @@
         <p:spPr>
           <a:xfrm>
             <a:off x="5074920" y="2688336"/>
-            <a:ext cx="6803136" cy="1024128"/>
+            <a:ext cx="6803136" cy="666528"/>
           </a:xfrm>
           <a:prstGeom prst="rect">
             <a:avLst/>
@@ -1175,7 +1180,7 @@
           </a:bodyPr>
           <a:lstStyle/>
           <a:p>
-            <a:pPr>
+            <a:pPr algn="l">
               <a:lnSpc>
                 <a:spcPct val="125000"/>
               </a:lnSpc>
@@ -1185,52 +1190,35 @@
               <a:spcAft>
                 <a:spcPts val="0"/>
               </a:spcAft>
-            </a:pPr>
-            <a:r>
-              <a:rPr lang="en-US" sz="1800">
+              <a:defRPr sz="1800" b="0">
                 <a:solidFill>
                   <a:srgbClr val="20354A"/>
                 </a:solidFill>
                 <a:latin typeface="Arial"/>
                 <a:ea typeface="Arial"/>
-              </a:rPr>
-              <a:t>Analyze execution and communication overheads on four FPGAs.</a:t>
-            </a:r>
-          </a:p>
-          <a:p>
-            <a:pPr>
-              <a:lnSpc>
-                <a:spcPct val="125000"/>
-              </a:lnSpc>
-              <a:spcBef>
-                <a:spcPts val="0"/>
-              </a:spcBef>
-              <a:spcAft>
-                <a:spcPts val="0"/>
-              </a:spcAft>
+              </a:defRPr>
             </a:pPr>
             <a:r>
-              <a:rPr lang="en-US" sz="1800">
+              <a:rPr sz="1800">
                 <a:solidFill>
                   <a:srgbClr val="20354A"/>
                 </a:solidFill>
                 <a:latin typeface="Arial"/>
-                <a:ea typeface="Arial"/>
               </a:rPr>
-              <a:t>Reduce polling overhead with interrupt-driven control.</a:t>
+              <a:t>Analyze execution and communication overheads on four FPGAs.</a:t>
             </a:r>
           </a:p>
         </p:txBody>
       </p:sp>
       <p:sp>
         <p:nvSpPr>
-          <p:cNvPr id="100008" name="S11.Item2.Separator"/>
+          <p:cNvPr id="100012" name="S11.Item3.Separator"/>
           <p:cNvSpPr/>
           <p:nvPr/>
         </p:nvSpPr>
         <p:spPr>
           <a:xfrm>
-            <a:off x="438912" y="3904488"/>
+            <a:off x="438912" y="3609067"/>
             <a:ext cx="11439144" cy="10973"/>
           </a:xfrm>
           <a:prstGeom prst="rect">
@@ -1261,13 +1249,13 @@
       </p:sp>
       <p:sp>
         <p:nvSpPr>
-          <p:cNvPr id="100009" name="S11.Item3.Number"/>
+          <p:cNvPr id="100013" name="S11.Item4.Number"/>
           <p:cNvSpPr txBox="1"/>
           <p:nvPr/>
         </p:nvSpPr>
         <p:spPr>
           <a:xfrm>
-            <a:off x="438912" y="4169664"/>
+            <a:off x="438912" y="3892531"/>
             <a:ext cx="347472" cy="438912"/>
           </a:xfrm>
           <a:prstGeom prst="rect">
@@ -1284,212 +1272,23 @@
           </a:bodyPr>
           <a:lstStyle/>
           <a:p>
-            <a:r>
-              <a:rPr lang="en-US" sz="2200" b="1">
+            <a:pPr algn="l">
+              <a:defRPr sz="2200" b="1">
                 <a:solidFill>
                   <a:srgbClr val="008C95"/>
                 </a:solidFill>
                 <a:latin typeface="Arial"/>
                 <a:ea typeface="Arial"/>
-              </a:rPr>
-              <a:t>3.</a:t>
-            </a:r>
-          </a:p>
-        </p:txBody>
-      </p:sp>
-      <p:sp>
-        <p:nvSpPr>
-          <p:cNvPr id="100010" name="S11.Item3.Heading"/>
-          <p:cNvSpPr txBox="1"/>
-          <p:nvPr/>
-        </p:nvSpPr>
-        <p:spPr>
-          <a:xfrm>
-            <a:off x="914400" y="4169664"/>
-            <a:ext cx="4005072" cy="841248"/>
-          </a:xfrm>
-          <a:prstGeom prst="rect">
-            <a:avLst/>
-          </a:prstGeom>
-          <a:noFill/>
-          <a:ln>
-            <a:noFill/>
-          </a:ln>
-        </p:spPr>
-        <p:txBody>
-          <a:bodyPr lIns="0" tIns="0" rIns="0" bIns="0">
-            <a:noAutofit/>
-          </a:bodyPr>
-          <a:lstStyle/>
-          <a:p>
-            <a:r>
-              <a:rPr lang="en-US" sz="2200" b="1">
-                <a:solidFill>
-                  <a:srgbClr val="183B56"/>
-                </a:solidFill>
-                <a:latin typeface="Arial"/>
-                <a:ea typeface="Arial"/>
-              </a:rPr>
-              <a:t>Partitioning Optimization</a:t>
-            </a:r>
-          </a:p>
-          <a:p>
-            <a:r>
-              <a:rPr lang="en-US" sz="2200" b="1">
-                <a:solidFill>
-                  <a:srgbClr val="183B56"/>
-                </a:solidFill>
-                <a:latin typeface="Arial"/>
-                <a:ea typeface="Arial"/>
-              </a:rPr>
-              <a:t>&amp; Evaluation</a:t>
-            </a:r>
-          </a:p>
-        </p:txBody>
-      </p:sp>
-      <p:sp>
-        <p:nvSpPr>
-          <p:cNvPr id="100011" name="S11.Item3.Body"/>
-          <p:cNvSpPr txBox="1"/>
-          <p:nvPr/>
-        </p:nvSpPr>
-        <p:spPr>
-          <a:xfrm>
-            <a:off x="5074920" y="4151376"/>
-            <a:ext cx="6803136" cy="1024128"/>
-          </a:xfrm>
-          <a:prstGeom prst="rect">
-            <a:avLst/>
-          </a:prstGeom>
-          <a:noFill/>
-          <a:ln>
-            <a:noFill/>
-          </a:ln>
-        </p:spPr>
-        <p:txBody>
-          <a:bodyPr lIns="0" tIns="0" rIns="0" bIns="0">
-            <a:noAutofit/>
-          </a:bodyPr>
-          <a:lstStyle/>
-          <a:p>
-            <a:pPr>
-              <a:lnSpc>
-                <a:spcPct val="125000"/>
-              </a:lnSpc>
-              <a:spcBef>
-                <a:spcPts val="0"/>
-              </a:spcBef>
-              <a:spcAft>
-                <a:spcPts val="0"/>
-              </a:spcAft>
+              </a:defRPr>
             </a:pPr>
             <a:r>
-              <a:rPr lang="en-US" sz="1800">
-                <a:solidFill>
-                  <a:srgbClr val="20354A"/>
-                </a:solidFill>
-                <a:latin typeface="Arial"/>
-                <a:ea typeface="Arial"/>
-              </a:rPr>
-              <a:t>Improve multi-resource balance and reduce communication cost.</a:t>
-            </a:r>
-          </a:p>
-          <a:p>
-            <a:pPr>
-              <a:lnSpc>
-                <a:spcPct val="125000"/>
-              </a:lnSpc>
-              <a:spcBef>
-                <a:spcPts val="0"/>
-              </a:spcBef>
-              <a:spcAft>
-                <a:spcPts val="0"/>
-              </a:spcAft>
-            </a:pPr>
-            <a:r>
-              <a:rPr lang="en-US" sz="1800">
-                <a:solidFill>
-                  <a:srgbClr val="20354A"/>
-                </a:solidFill>
-                <a:latin typeface="Arial"/>
-                <a:ea typeface="Arial"/>
-              </a:rPr>
-              <a:t>Evaluate the impact on emulation performance.</a:t>
-            </a:r>
-          </a:p>
-        </p:txBody>
-      </p:sp>
-      <p:sp>
-        <p:nvSpPr>
-          <p:cNvPr id="100012" name="S11.Item3.Separator"/>
-          <p:cNvSpPr/>
-          <p:nvPr/>
-        </p:nvSpPr>
-        <p:spPr>
-          <a:xfrm>
-            <a:off x="438912" y="5367528"/>
-            <a:ext cx="11439144" cy="10973"/>
-          </a:xfrm>
-          <a:prstGeom prst="rect">
-            <a:avLst/>
-          </a:prstGeom>
-          <a:solidFill>
-            <a:srgbClr val="D8E3E9"/>
-          </a:solidFill>
-          <a:ln>
-            <a:noFill/>
-          </a:ln>
-        </p:spPr>
-        <p:txBody>
-          <a:bodyPr lIns="0" tIns="0" rIns="0" bIns="0">
-            <a:noAutofit/>
-          </a:bodyPr>
-          <a:lstStyle/>
-          <a:p>
-            <a:endParaRPr lang="en-US" sz="1800">
-              <a:solidFill>
-                <a:srgbClr val="20354A"/>
-              </a:solidFill>
-              <a:latin typeface="Arial"/>
-              <a:ea typeface="Arial"/>
-            </a:endParaRPr>
-          </a:p>
-        </p:txBody>
-      </p:sp>
-      <p:sp>
-        <p:nvSpPr>
-          <p:cNvPr id="100013" name="S11.Item4.Number"/>
-          <p:cNvSpPr txBox="1"/>
-          <p:nvPr/>
-        </p:nvSpPr>
-        <p:spPr>
-          <a:xfrm>
-            <a:off x="438912" y="5650992"/>
-            <a:ext cx="347472" cy="438912"/>
-          </a:xfrm>
-          <a:prstGeom prst="rect">
-            <a:avLst/>
-          </a:prstGeom>
-          <a:noFill/>
-          <a:ln>
-            <a:noFill/>
-          </a:ln>
-        </p:spPr>
-        <p:txBody>
-          <a:bodyPr lIns="0" tIns="0" rIns="0" bIns="0">
-            <a:noAutofit/>
-          </a:bodyPr>
-          <a:lstStyle/>
-          <a:p>
-            <a:r>
-              <a:rPr lang="en-US" sz="2200" b="1">
+              <a:rPr sz="2200" b="1">
                 <a:solidFill>
                   <a:srgbClr val="008C95"/>
                 </a:solidFill>
                 <a:latin typeface="Arial"/>
-                <a:ea typeface="Arial"/>
               </a:rPr>
-              <a:t>4.</a:t>
+              <a:t>3.</a:t>
             </a:r>
           </a:p>
         </p:txBody>
@@ -1502,7 +1301,7 @@
         </p:nvSpPr>
         <p:spPr>
           <a:xfrm>
-            <a:off x="914400" y="5650992"/>
+            <a:off x="914400" y="3892531"/>
             <a:ext cx="4005072" cy="841248"/>
           </a:xfrm>
           <a:prstGeom prst="rect">
@@ -1540,7 +1339,7 @@
         </p:nvSpPr>
         <p:spPr>
           <a:xfrm>
-            <a:off x="5074920" y="5632704"/>
+            <a:off x="5074920" y="3874243"/>
             <a:ext cx="6803136" cy="1024128"/>
           </a:xfrm>
           <a:prstGeom prst="rect">

--- a/pptx/midterm/REMUS_Future_Work_Slide_11.pptx
+++ b/pptx/midterm/REMUS_Future_Work_Slide_11.pptx
@@ -5,10 +5,10 @@
     <p:sldMasterId xmlns:r="http://schemas.openxmlformats.org/officeDocument/2006/relationships" id="2147483648" r:id="rId1"/>
   </p:sldMasterIdLst>
   <p:notesMasterIdLst>
-    <p:notesMasterId r:id="R4661ba8767b84bb2"/>
+    <p:notesMasterId r:id="Rb4bca749993a4adf"/>
   </p:notesMasterIdLst>
   <p:sldIdLst>
-    <p:sldId id="256" r:id="R104014dbd06f42e4"/>
+    <p:sldId id="256" r:id="R442bcd70bde04909"/>
   </p:sldIdLst>
   <p:sldSz cx="12192000" cy="6858000" type="screen16x9"/>
   <p:notesSz cx="6858000" cy="9144000"/>
@@ -337,13 +337,13 @@
         <a:srgbClr val="E7E6E6"/>
       </a:lt2>
       <a:accent1>
-        <a:srgbClr val="183B56"/>
+        <a:srgbClr val="C00000"/>
       </a:accent1>
       <a:accent2>
-        <a:srgbClr val="008C95"/>
+        <a:srgbClr val="70AD47"/>
       </a:accent2>
       <a:accent3>
-        <a:srgbClr val="DF973E"/>
+        <a:srgbClr val="ED7D31"/>
       </a:accent3>
       <a:accent4>
         <a:srgbClr val="FFC000"/>
@@ -823,7 +823,7 @@
             <a:r>
               <a:rPr lang="en-US" sz="3200" b="1">
                 <a:solidFill>
-                  <a:srgbClr val="183B56"/>
+                  <a:srgbClr val="C00000"/>
                 </a:solidFill>
                 <a:latin typeface="Arial"/>
                 <a:ea typeface="Arial"/>
@@ -848,10 +848,12 @@
             <a:avLst/>
           </a:prstGeom>
           <a:solidFill>
-            <a:srgbClr val="008C95"/>
+            <a:srgbClr val="C55A11"/>
           </a:solidFill>
           <a:ln>
-            <a:noFill/>
+            <a:solidFill>
+              <a:srgbClr val="C55A11"/>
+            </a:solidFill>
           </a:ln>
         </p:spPr>
         <p:txBody>
@@ -862,7 +864,7 @@
           <a:p>
             <a:endParaRPr lang="en-US" sz="1800">
               <a:solidFill>
-                <a:srgbClr val="20354A"/>
+                <a:srgbClr val="C55A11"/>
               </a:solidFill>
               <a:latin typeface="Arial"/>
               <a:ea typeface="Arial"/>
@@ -898,7 +900,7 @@
             <a:r>
               <a:rPr lang="en-US" sz="2200" b="1">
                 <a:solidFill>
-                  <a:srgbClr val="008C95"/>
+                  <a:srgbClr val="70AD47"/>
                 </a:solidFill>
                 <a:latin typeface="Arial"/>
                 <a:ea typeface="Arial"/>
@@ -936,7 +938,7 @@
             <a:r>
               <a:rPr lang="en-US" sz="2200" b="1">
                 <a:solidFill>
-                  <a:srgbClr val="183B56"/>
+                  <a:srgbClr val="333333"/>
                 </a:solidFill>
                 <a:latin typeface="Arial"/>
                 <a:ea typeface="Arial"/>
@@ -948,7 +950,7 @@
             <a:r>
               <a:rPr lang="en-US" sz="2200" b="1">
                 <a:solidFill>
-                  <a:srgbClr val="183B56"/>
+                  <a:srgbClr val="333333"/>
                 </a:solidFill>
                 <a:latin typeface="Arial"/>
                 <a:ea typeface="Arial"/>
@@ -997,7 +999,7 @@
             <a:r>
               <a:rPr lang="en-US" sz="1800">
                 <a:solidFill>
-                  <a:srgbClr val="20354A"/>
+                  <a:srgbClr val="1F1F1F"/>
                 </a:solidFill>
                 <a:latin typeface="Arial"/>
                 <a:ea typeface="Arial"/>
@@ -1020,7 +1022,7 @@
             <a:r>
               <a:rPr lang="en-US" sz="1800">
                 <a:solidFill>
-                  <a:srgbClr val="20354A"/>
+                  <a:srgbClr val="1F1F1F"/>
                 </a:solidFill>
                 <a:latin typeface="Arial"/>
                 <a:ea typeface="Arial"/>
@@ -1045,7 +1047,7 @@
             <a:avLst/>
           </a:prstGeom>
           <a:solidFill>
-            <a:srgbClr val="D8E3E9"/>
+            <a:srgbClr val="DEDEDE"/>
           </a:solidFill>
           <a:ln>
             <a:noFill/>
@@ -1059,7 +1061,7 @@
           <a:p>
             <a:endParaRPr lang="en-US" sz="1800">
               <a:solidFill>
-                <a:srgbClr val="20354A"/>
+                <a:srgbClr val="1F1F1F"/>
               </a:solidFill>
               <a:latin typeface="Arial"/>
               <a:ea typeface="Arial"/>
@@ -1095,7 +1097,7 @@
             <a:r>
               <a:rPr lang="en-US" sz="2200" b="1">
                 <a:solidFill>
-                  <a:srgbClr val="008C95"/>
+                  <a:srgbClr val="70AD47"/>
                 </a:solidFill>
                 <a:latin typeface="Arial"/>
                 <a:ea typeface="Arial"/>
@@ -1133,7 +1135,7 @@
             <a:r>
               <a:rPr lang="en-US" sz="2200" b="1">
                 <a:solidFill>
-                  <a:srgbClr val="183B56"/>
+                  <a:srgbClr val="333333"/>
                 </a:solidFill>
                 <a:latin typeface="Arial"/>
                 <a:ea typeface="Arial"/>
@@ -1145,7 +1147,7 @@
             <a:r>
               <a:rPr lang="en-US" sz="2200" b="1">
                 <a:solidFill>
-                  <a:srgbClr val="183B56"/>
+                  <a:srgbClr val="333333"/>
                 </a:solidFill>
                 <a:latin typeface="Arial"/>
                 <a:ea typeface="Arial"/>
@@ -1192,7 +1194,7 @@
               </a:spcAft>
               <a:defRPr sz="1800" b="0">
                 <a:solidFill>
-                  <a:srgbClr val="20354A"/>
+                  <a:srgbClr val="1F1F1F"/>
                 </a:solidFill>
                 <a:latin typeface="Arial"/>
                 <a:ea typeface="Arial"/>
@@ -1201,7 +1203,7 @@
             <a:r>
               <a:rPr sz="1800">
                 <a:solidFill>
-                  <a:srgbClr val="20354A"/>
+                  <a:srgbClr val="1F1F1F"/>
                 </a:solidFill>
                 <a:latin typeface="Arial"/>
               </a:rPr>
@@ -1225,7 +1227,7 @@
             <a:avLst/>
           </a:prstGeom>
           <a:solidFill>
-            <a:srgbClr val="D8E3E9"/>
+            <a:srgbClr val="DEDEDE"/>
           </a:solidFill>
           <a:ln>
             <a:noFill/>
@@ -1239,7 +1241,7 @@
           <a:p>
             <a:endParaRPr lang="en-US" sz="1800">
               <a:solidFill>
-                <a:srgbClr val="20354A"/>
+                <a:srgbClr val="1F1F1F"/>
               </a:solidFill>
               <a:latin typeface="Arial"/>
               <a:ea typeface="Arial"/>
@@ -1275,7 +1277,7 @@
             <a:pPr algn="l">
               <a:defRPr sz="2200" b="1">
                 <a:solidFill>
-                  <a:srgbClr val="008C95"/>
+                  <a:srgbClr val="70AD47"/>
                 </a:solidFill>
                 <a:latin typeface="Arial"/>
                 <a:ea typeface="Arial"/>
@@ -1284,7 +1286,7 @@
             <a:r>
               <a:rPr sz="2200" b="1">
                 <a:solidFill>
-                  <a:srgbClr val="008C95"/>
+                  <a:srgbClr val="70AD47"/>
                 </a:solidFill>
                 <a:latin typeface="Arial"/>
               </a:rPr>
@@ -1321,7 +1323,7 @@
             <a:r>
               <a:rPr lang="en-US" sz="2200" b="1">
                 <a:solidFill>
-                  <a:srgbClr val="183B56"/>
+                  <a:srgbClr val="333333"/>
                 </a:solidFill>
                 <a:latin typeface="Arial"/>
                 <a:ea typeface="Arial"/>
@@ -1370,7 +1372,7 @@
             <a:r>
               <a:rPr lang="en-US" sz="1800">
                 <a:solidFill>
-                  <a:srgbClr val="20354A"/>
+                  <a:srgbClr val="1F1F1F"/>
                 </a:solidFill>
                 <a:latin typeface="Arial"/>
                 <a:ea typeface="Arial"/>
@@ -1409,7 +1411,7 @@
             <a:r>
               <a:rPr lang="en-US" sz="1000">
                 <a:solidFill>
-                  <a:srgbClr val="607184"/>
+                  <a:srgbClr val="898989"/>
                 </a:solidFill>
                 <a:latin typeface="Arial"/>
                 <a:ea typeface="Arial"/>
@@ -1441,13 +1443,13 @@
         <a:srgbClr val="E7E6E6"/>
       </a:lt2>
       <a:accent1>
-        <a:srgbClr val="183B56"/>
+        <a:srgbClr val="C00000"/>
       </a:accent1>
       <a:accent2>
-        <a:srgbClr val="008C95"/>
+        <a:srgbClr val="70AD47"/>
       </a:accent2>
       <a:accent3>
-        <a:srgbClr val="DF973E"/>
+        <a:srgbClr val="ED7D31"/>
       </a:accent3>
       <a:accent4>
         <a:srgbClr val="FFC000"/>
